--- a/dist/초3/수학/자연수계산/초3_수학_자연수계산_04_곱셈구구로몫구하기.pptx
+++ b/dist/초3/수학/자연수계산/초3_수학_자연수계산_04_곱셈구구로몫구하기.pptx
@@ -119,45 +119,45 @@
   <p:extLst>
     <p:ext uri="{521415D9-36F7-43E2-AB2F-B90AF26B5E84}">
       <p14:sectionLst xmlns:p14="http://schemas.microsoft.com/office/powerpoint/2010/main">
-        <p14:section name="도입" id="{2509add1-e090-2fb7-54c2-55ff62e03b93}">
+        <p14:section name="도입" id="{ec58c236-93b9-58ef-8929-bec08d5c2fb5}">
           <p14:sldIdLst>
             <p14:sldId id="256"/>
             <p14:sldId id="257"/>
           </p14:sldIdLst>
         </p14:section>
-        <p14:section name="개념" id="{4a16c9bd-156c-420a-fc13-4c28d73fe7f7}">
+        <p14:section name="개념" id="{1bf8de91-ec95-becd-f759-a98a28936f53}">
           <p14:sldIdLst>
             <p14:sldId id="258"/>
             <p14:sldId id="259"/>
             <p14:sldId id="262"/>
           </p14:sldIdLst>
         </p14:section>
-        <p14:section name="연습" id="{46921c06-b32e-d66a-ceb3-3295314e2e52}">
+        <p14:section name="연습" id="{8ea41cd7-3e80-1e07-bff9-5d7d02c1e434}">
           <p14:sldIdLst>
             <p14:sldId id="260"/>
             <p14:sldId id="261"/>
             <p14:sldId id="263"/>
           </p14:sldIdLst>
         </p14:section>
-        <p14:section name="개념" id="{2b8c5adc-d824-b76a-c58e-e58f43e3b6c9}">
+        <p14:section name="개념" id="{6d2acbea-6498-f3a0-080c-cd1f1189e4c5}">
           <p14:sldIdLst/>
         </p14:section>
-        <p14:section name="연습" id="{be831c59-cc40-1292-0956-f4b8f1d0d729}">
+        <p14:section name="연습" id="{d58c17b1-416a-bec2-4f46-56a76b54d5f6}">
           <p14:sldIdLst/>
         </p14:section>
-        <p14:section name="확인" id="{d432dee0-a1c2-a15e-c5df-be5dd526c541}">
+        <p14:section name="확인" id="{dab794cb-b0ef-9a10-15b3-adf6342d24c0}">
           <p14:sldIdLst>
             <p14:sldId id="264"/>
             <p14:sldId id="265"/>
             <p14:sldId id="266"/>
           </p14:sldIdLst>
         </p14:section>
-        <p14:section name="정리" id="{06a0de4f-e8f7-2597-aedd-4bab4f05308c}">
+        <p14:section name="정리" id="{ec09f2f6-81ef-5812-1835-c67aac9b18cc}">
           <p14:sldIdLst>
             <p14:sldId id="267"/>
           </p14:sldIdLst>
         </p14:section>
-        <p14:section name="보충" id="{08cdea85-5d1e-a21a-fe45-ca42db6d2abb}">
+        <p14:section name="보충" id="{ccab806f-a1f9-a1db-1bb3-7a43d642f049}">
           <p14:sldIdLst>
             <p14:sldId id="268"/>
           </p14:sldIdLst>
@@ -7587,7 +7587,7 @@
           </p:nvPr>
         </p:nvGraphicFramePr>
         <p:xfrm>
-          <a:off x="973836" y="2404110"/>
+          <a:off x="973836" y="2434590"/>
           <a:ext cx="10241280" cy="914400"/>
         </p:xfrm>
         <a:graphic>
@@ -7606,7 +7606,7 @@
                 <a:gridCol w="1024128"/>
                 <a:gridCol w="1024128"/>
               </a:tblGrid>
-              <a:tr h="487680">
+              <a:tr h="472440">
                 <a:tc>
                   <a:txBody>
                     <a:bodyPr/>
@@ -8288,7 +8288,7 @@
                   </a:tcPr>
                 </a:tc>
               </a:tr>
-              <a:tr h="487680">
+              <a:tr h="472440">
                 <a:tc>
                   <a:txBody>
                     <a:bodyPr/>
@@ -8970,7 +8970,7 @@
                   </a:tcPr>
                 </a:tc>
               </a:tr>
-              <a:tr h="487680">
+              <a:tr h="472440">
                 <a:tc>
                   <a:txBody>
                     <a:bodyPr/>
@@ -9652,7 +9652,7 @@
                   </a:tcPr>
                 </a:tc>
               </a:tr>
-              <a:tr h="487680">
+              <a:tr h="472440">
                 <a:tc>
                   <a:txBody>
                     <a:bodyPr/>
